--- a/figures/ppt/fig3_frames.pptx
+++ b/figures/ppt/fig3_frames.pptx
@@ -3108,6 +3108,7 @@
             </a:solidFill>
             <a:tailEnd type="triangle" w="sm" len="sm"/>
           </a:ln>
+          <a:effectLst/>
         </p:spPr>
         <p:style>
           <a:lnRef idx="2">
@@ -3144,6 +3145,7 @@
             </a:solidFill>
             <a:tailEnd type="triangle" w="sm" len="sm"/>
           </a:ln>
+          <a:effectLst/>
         </p:spPr>
         <p:style>
           <a:lnRef idx="2">
@@ -3509,6 +3511,7 @@
             </a:solidFill>
             <a:tailEnd type="triangle" w="sm" len="sm"/>
           </a:ln>
+          <a:effectLst/>
         </p:spPr>
         <p:style>
           <a:lnRef idx="2">
@@ -3659,6 +3662,7 @@
             <a:prstDash val="dash"/>
             <a:tailEnd type="triangle" w="sm" len="sm"/>
           </a:ln>
+          <a:effectLst/>
         </p:spPr>
         <p:style>
           <a:lnRef idx="2">
@@ -3695,6 +3699,7 @@
             </a:solidFill>
             <a:prstDash val="dash"/>
           </a:ln>
+          <a:effectLst/>
         </p:spPr>
         <p:style>
           <a:lnRef idx="2">
@@ -3864,6 +3869,7 @@
             </a:solidFill>
             <a:tailEnd type="triangle" w="sm" len="sm"/>
           </a:ln>
+          <a:effectLst/>
         </p:spPr>
         <p:style>
           <a:lnRef idx="2">
@@ -3939,6 +3945,7 @@
             </a:solidFill>
             <a:tailEnd type="triangle" w="sm" len="sm"/>
           </a:ln>
+          <a:effectLst/>
         </p:spPr>
         <p:style>
           <a:lnRef idx="2">
@@ -4160,6 +4167,7 @@
             </a:solidFill>
             <a:prstDash val="dash"/>
           </a:ln>
+          <a:effectLst/>
         </p:spPr>
         <p:style>
           <a:lnRef idx="2">
@@ -4196,6 +4204,7 @@
             </a:solidFill>
             <a:tailEnd type="triangle" w="sm" len="sm"/>
           </a:ln>
+          <a:effectLst/>
         </p:spPr>
         <p:style>
           <a:lnRef idx="2">
@@ -4425,7 +4434,7 @@
       </p:sp>
       <p:pic>
         <p:nvPicPr>
-          <p:cNvPr id="29" name="photo_sterndrive" descr="sterndrive.jpg"/>
+          <p:cNvPr id="29" name="photo_sterndrive" descr="sterndrive_lifted.jpg"/>
           <p:cNvPicPr>
             <a:picLocks noChangeAspect="1"/>
           </p:cNvPicPr>
@@ -4467,6 +4476,7 @@
             </a:solidFill>
             <a:tailEnd type="triangle" w="sm" len="sm"/>
           </a:ln>
+          <a:effectLst/>
         </p:spPr>
         <p:style>
           <a:lnRef idx="2">
@@ -4566,6 +4576,7 @@
             </a:solidFill>
             <a:tailEnd type="triangle" w="sm" len="sm"/>
           </a:ln>
+          <a:effectLst/>
         </p:spPr>
         <p:style>
           <a:lnRef idx="2">
@@ -4917,42 +4928,13 @@
       </a:lnStyleLst>
       <a:effectStyleLst>
         <a:effectStyle>
-          <a:effectLst>
-            <a:outerShdw blurRad="40000" dist="20000" dir="5400000" rotWithShape="0">
-              <a:srgbClr val="000000">
-                <a:alpha val="38000"/>
-              </a:srgbClr>
-            </a:outerShdw>
-          </a:effectLst>
+          <a:effectLst/>
         </a:effectStyle>
         <a:effectStyle>
-          <a:effectLst>
-            <a:outerShdw blurRad="40000" dist="23000" dir="5400000" rotWithShape="0">
-              <a:srgbClr val="000000">
-                <a:alpha val="35000"/>
-              </a:srgbClr>
-            </a:outerShdw>
-          </a:effectLst>
+          <a:effectLst/>
         </a:effectStyle>
         <a:effectStyle>
-          <a:effectLst>
-            <a:outerShdw blurRad="40000" dist="23000" dir="5400000" rotWithShape="0">
-              <a:srgbClr val="000000">
-                <a:alpha val="35000"/>
-              </a:srgbClr>
-            </a:outerShdw>
-          </a:effectLst>
-          <a:scene3d>
-            <a:camera prst="orthographicFront">
-              <a:rot lat="0" lon="0" rev="0"/>
-            </a:camera>
-            <a:lightRig rig="threePt" dir="t">
-              <a:rot lat="0" lon="0" rev="1200000"/>
-            </a:lightRig>
-          </a:scene3d>
-          <a:sp3d>
-            <a:bevelT w="63500" h="25400"/>
-          </a:sp3d>
+          <a:effectLst/>
         </a:effectStyle>
       </a:effectStyleLst>
       <a:bgFillStyleLst>

--- a/figures/ppt/fig3_frames.pptx
+++ b/figures/ppt/fig3_frames.pptx
@@ -7,7 +7,7 @@
   <p:sldIdLst>
     <p:sldId id="256" r:id="rId7"/>
   </p:sldIdLst>
-  <p:sldSz cx="3200400" cy="1755648" type="screen4x3"/>
+  <p:sldSz cx="1700784" cy="1664208" type="screen4x3"/>
   <p:notesSz cx="6858000" cy="9144000"/>
   <p:defaultTextStyle>
     <a:defPPr>
@@ -4428,308 +4428,6 @@
                 <a:latin typeface="Times New Roman"/>
               </a:rPr>
               <a:t>d</a:t>
-            </a:r>
-          </a:p>
-        </p:txBody>
-      </p:sp>
-      <p:pic>
-        <p:nvPicPr>
-          <p:cNvPr id="29" name="photo_sterndrive" descr="sterndrive_lifted.jpg"/>
-          <p:cNvPicPr>
-            <a:picLocks noChangeAspect="1"/>
-          </p:cNvPicPr>
-          <p:nvPr/>
-        </p:nvPicPr>
-        <p:blipFill>
-          <a:blip r:embed="rId2"/>
-          <a:stretch>
-            <a:fillRect/>
-          </a:stretch>
-        </p:blipFill>
-        <p:spPr>
-          <a:xfrm>
-            <a:off x="1700784" y="284509"/>
-            <a:ext cx="1463040" cy="1022037"/>
-          </a:xfrm>
-          <a:prstGeom prst="rect">
-            <a:avLst/>
-          </a:prstGeom>
-        </p:spPr>
-      </p:pic>
-      <p:cxnSp>
-        <p:nvCxnSpPr>
-          <p:cNvPr id="30" name="Connector 29"/>
-          <p:cNvCxnSpPr/>
-          <p:nvPr/>
-        </p:nvCxnSpPr>
-        <p:spPr>
-          <a:xfrm flipH="1">
-            <a:off x="1857538" y="442569"/>
-            <a:ext cx="83602" cy="333103"/>
-          </a:xfrm>
-          <a:prstGeom prst="line">
-            <a:avLst/>
-          </a:prstGeom>
-          <a:ln w="12700">
-            <a:solidFill>
-              <a:srgbClr val="FFD000"/>
-            </a:solidFill>
-            <a:tailEnd type="triangle" w="sm" len="sm"/>
-          </a:ln>
-          <a:effectLst/>
-        </p:spPr>
-        <p:style>
-          <a:lnRef idx="2">
-            <a:schemeClr val="accent1"/>
-          </a:lnRef>
-          <a:fillRef idx="0">
-            <a:schemeClr val="accent1"/>
-          </a:fillRef>
-          <a:effectRef idx="1">
-            <a:schemeClr val="accent1"/>
-          </a:effectRef>
-          <a:fontRef idx="minor">
-            <a:schemeClr val="tx1"/>
-          </a:fontRef>
-        </p:style>
-      </p:cxnSp>
-      <p:sp>
-        <p:nvSpPr>
-          <p:cNvPr id="31" name="Rounded Rectangle 30"/>
-          <p:cNvSpPr/>
-          <p:nvPr/>
-        </p:nvSpPr>
-        <p:spPr>
-          <a:xfrm>
-            <a:off x="1694252" y="314553"/>
-            <a:ext cx="493776" cy="128016"/>
-          </a:xfrm>
-          <a:prstGeom prst="roundRect">
-            <a:avLst>
-              <a:gd name="adj" fmla="val 28571"/>
-            </a:avLst>
-          </a:prstGeom>
-          <a:solidFill>
-            <a:srgbClr val="FFFFFF"/>
-          </a:solidFill>
-          <a:ln w="7620">
-            <a:solidFill>
-              <a:srgbClr val="2E5A87"/>
-            </a:solidFill>
-          </a:ln>
-          <a:effectLst/>
-        </p:spPr>
-        <p:style>
-          <a:lnRef idx="1">
-            <a:schemeClr val="accent1"/>
-          </a:lnRef>
-          <a:fillRef idx="3">
-            <a:schemeClr val="accent1"/>
-          </a:fillRef>
-          <a:effectRef idx="2">
-            <a:schemeClr val="accent1"/>
-          </a:effectRef>
-          <a:fontRef idx="minor">
-            <a:schemeClr val="lt1"/>
-          </a:fontRef>
-        </p:style>
-        <p:txBody>
-          <a:bodyPr rtlCol="0" anchor="ctr" wrap="none" lIns="0" rIns="0" tIns="0" bIns="0">
-            <a:noAutofit/>
-          </a:bodyPr>
-          <a:lstStyle/>
-          <a:p>
-            <a:pPr algn="ctr">
-              <a:lnSpc>
-                <a:spcPct val="105000"/>
-              </a:lnSpc>
-            </a:pPr>
-            <a:r>
-              <a:rPr sz="600" b="0" i="0">
-                <a:solidFill>
-                  <a:srgbClr val="000000"/>
-                </a:solidFill>
-                <a:latin typeface="Times New Roman"/>
-              </a:rPr>
-              <a:t>Propeller</a:t>
-            </a:r>
-          </a:p>
-        </p:txBody>
-      </p:sp>
-      <p:cxnSp>
-        <p:nvCxnSpPr>
-          <p:cNvPr id="32" name="Connector 31"/>
-          <p:cNvCxnSpPr/>
-          <p:nvPr/>
-        </p:nvCxnSpPr>
-        <p:spPr>
-          <a:xfrm flipH="1">
-            <a:off x="2536806" y="442569"/>
-            <a:ext cx="271708" cy="186799"/>
-          </a:xfrm>
-          <a:prstGeom prst="line">
-            <a:avLst/>
-          </a:prstGeom>
-          <a:ln w="12700">
-            <a:solidFill>
-              <a:srgbClr val="FFD000"/>
-            </a:solidFill>
-            <a:tailEnd type="triangle" w="sm" len="sm"/>
-          </a:ln>
-          <a:effectLst/>
-        </p:spPr>
-        <p:style>
-          <a:lnRef idx="2">
-            <a:schemeClr val="accent1"/>
-          </a:lnRef>
-          <a:fillRef idx="0">
-            <a:schemeClr val="accent1"/>
-          </a:fillRef>
-          <a:effectRef idx="1">
-            <a:schemeClr val="accent1"/>
-          </a:effectRef>
-          <a:fontRef idx="minor">
-            <a:schemeClr val="tx1"/>
-          </a:fontRef>
-        </p:style>
-      </p:cxnSp>
-      <p:sp>
-        <p:nvSpPr>
-          <p:cNvPr id="33" name="Rounded Rectangle 32"/>
-          <p:cNvSpPr/>
-          <p:nvPr/>
-        </p:nvSpPr>
-        <p:spPr>
-          <a:xfrm>
-            <a:off x="2561626" y="314553"/>
-            <a:ext cx="493776" cy="128016"/>
-          </a:xfrm>
-          <a:prstGeom prst="roundRect">
-            <a:avLst>
-              <a:gd name="adj" fmla="val 28571"/>
-            </a:avLst>
-          </a:prstGeom>
-          <a:solidFill>
-            <a:srgbClr val="FFFFFF"/>
-          </a:solidFill>
-          <a:ln w="7620">
-            <a:solidFill>
-              <a:srgbClr val="2E5A87"/>
-            </a:solidFill>
-          </a:ln>
-          <a:effectLst/>
-        </p:spPr>
-        <p:style>
-          <a:lnRef idx="1">
-            <a:schemeClr val="accent1"/>
-          </a:lnRef>
-          <a:fillRef idx="3">
-            <a:schemeClr val="accent1"/>
-          </a:fillRef>
-          <a:effectRef idx="2">
-            <a:schemeClr val="accent1"/>
-          </a:effectRef>
-          <a:fontRef idx="minor">
-            <a:schemeClr val="lt1"/>
-          </a:fontRef>
-        </p:style>
-        <p:txBody>
-          <a:bodyPr rtlCol="0" anchor="ctr" wrap="none" lIns="0" rIns="0" tIns="0" bIns="0">
-            <a:noAutofit/>
-          </a:bodyPr>
-          <a:lstStyle/>
-          <a:p>
-            <a:pPr algn="ctr">
-              <a:lnSpc>
-                <a:spcPct val="105000"/>
-              </a:lnSpc>
-            </a:pPr>
-            <a:r>
-              <a:rPr sz="600" b="0" i="0">
-                <a:solidFill>
-                  <a:srgbClr val="000000"/>
-                </a:solidFill>
-                <a:latin typeface="Times New Roman"/>
-              </a:rPr>
-              <a:t>Sterndrive</a:t>
-            </a:r>
-          </a:p>
-        </p:txBody>
-      </p:sp>
-      <p:sp>
-        <p:nvSpPr>
-          <p:cNvPr id="34" name="TextBox 33"/>
-          <p:cNvSpPr txBox="1"/>
-          <p:nvPr/>
-        </p:nvSpPr>
-        <p:spPr>
-          <a:xfrm>
-            <a:off x="640080" y="1600200"/>
-            <a:ext cx="365760" cy="128016"/>
-          </a:xfrm>
-          <a:prstGeom prst="rect">
-            <a:avLst/>
-          </a:prstGeom>
-          <a:noFill/>
-        </p:spPr>
-        <p:txBody>
-          <a:bodyPr wrap="none" lIns="0" rIns="0" tIns="0" bIns="0" anchor="ctr">
-            <a:noAutofit/>
-          </a:bodyPr>
-          <a:lstStyle/>
-          <a:p>
-            <a:pPr algn="ctr">
-              <a:lnSpc>
-                <a:spcPct val="105000"/>
-              </a:lnSpc>
-            </a:pPr>
-            <a:r>
-              <a:rPr sz="750" b="0" i="0">
-                <a:solidFill>
-                  <a:srgbClr val="000000"/>
-                </a:solidFill>
-                <a:latin typeface="Times New Roman"/>
-              </a:rPr>
-              <a:t>(a)</a:t>
-            </a:r>
-          </a:p>
-        </p:txBody>
-      </p:sp>
-      <p:sp>
-        <p:nvSpPr>
-          <p:cNvPr id="35" name="TextBox 34"/>
-          <p:cNvSpPr txBox="1"/>
-          <p:nvPr/>
-        </p:nvSpPr>
-        <p:spPr>
-          <a:xfrm>
-            <a:off x="2249424" y="1600200"/>
-            <a:ext cx="365760" cy="128016"/>
-          </a:xfrm>
-          <a:prstGeom prst="rect">
-            <a:avLst/>
-          </a:prstGeom>
-          <a:noFill/>
-        </p:spPr>
-        <p:txBody>
-          <a:bodyPr wrap="none" lIns="0" rIns="0" tIns="0" bIns="0" anchor="ctr">
-            <a:noAutofit/>
-          </a:bodyPr>
-          <a:lstStyle/>
-          <a:p>
-            <a:pPr algn="ctr">
-              <a:lnSpc>
-                <a:spcPct val="105000"/>
-              </a:lnSpc>
-            </a:pPr>
-            <a:r>
-              <a:rPr sz="750" b="0" i="0">
-                <a:solidFill>
-                  <a:srgbClr val="000000"/>
-                </a:solidFill>
-                <a:latin typeface="Times New Roman"/>
-              </a:rPr>
-              <a:t>(b)</a:t>
             </a:r>
           </a:p>
         </p:txBody>

--- a/figures/ppt/fig3_frames.pptx
+++ b/figures/ppt/fig3_frames.pptx
@@ -4155,8 +4155,8 @@
         </p:nvCxnSpPr>
         <p:spPr>
           <a:xfrm flipH="1">
-            <a:off x="816615" y="787454"/>
-            <a:ext cx="157343" cy="224710"/>
+            <a:off x="795636" y="787454"/>
+            <a:ext cx="178322" cy="254671"/>
           </a:xfrm>
           <a:prstGeom prst="line">
             <a:avLst/>
@@ -4184,16 +4184,194 @@
           </a:fontRef>
         </p:style>
       </p:cxnSp>
+      <p:sp>
+        <p:nvSpPr>
+          <p:cNvPr id="24" name="sterndrive_leg"/>
+          <p:cNvSpPr/>
+          <p:nvPr/>
+        </p:nvSpPr>
+        <p:spPr>
+          <a:xfrm>
+            <a:off x="873170" y="768628"/>
+            <a:ext cx="116937" cy="83668"/>
+          </a:xfrm>
+          <a:custGeom>
+            <a:avLst/>
+            <a:gdLst/>
+            <a:ahLst/>
+            <a:cxnLst/>
+            <a:rect l="l" t="t" r="r" b="b"/>
+            <a:pathLst>
+              <a:path w="116937" h="83668">
+                <a:moveTo>
+                  <a:pt x="100478" y="0"/>
+                </a:moveTo>
+                <a:lnTo>
+                  <a:pt x="116937" y="28508"/>
+                </a:lnTo>
+                <a:lnTo>
+                  <a:pt x="11522" y="83668"/>
+                </a:lnTo>
+                <a:lnTo>
+                  <a:pt x="0" y="63712"/>
+                </a:lnTo>
+                <a:close/>
+              </a:path>
+            </a:pathLst>
+          </a:custGeom>
+          <a:solidFill>
+            <a:srgbClr val="1B3A5C"/>
+          </a:solidFill>
+          <a:ln>
+            <a:noFill/>
+          </a:ln>
+          <a:effectLst/>
+        </p:spPr>
+        <p:style>
+          <a:lnRef idx="1">
+            <a:schemeClr val="accent1"/>
+          </a:lnRef>
+          <a:fillRef idx="3">
+            <a:schemeClr val="accent1"/>
+          </a:fillRef>
+          <a:effectRef idx="2">
+            <a:schemeClr val="accent1"/>
+          </a:effectRef>
+          <a:fontRef idx="minor">
+            <a:schemeClr val="lt1"/>
+          </a:fontRef>
+        </p:style>
+        <p:txBody>
+          <a:bodyPr rtlCol="0" anchor="ctr"/>
+          <a:lstStyle/>
+          <a:p>
+            <a:pPr algn="ctr"/>
+          </a:p>
+        </p:txBody>
+      </p:sp>
+      <p:sp>
+        <p:nvSpPr>
+          <p:cNvPr id="25" name="propeller_blades"/>
+          <p:cNvSpPr/>
+          <p:nvPr/>
+        </p:nvSpPr>
+        <p:spPr>
+          <a:xfrm>
+            <a:off x="836722" y="778354"/>
+            <a:ext cx="84418" cy="127928"/>
+          </a:xfrm>
+          <a:custGeom>
+            <a:avLst/>
+            <a:gdLst/>
+            <a:ahLst/>
+            <a:cxnLst/>
+            <a:rect l="l" t="t" r="r" b="b"/>
+            <a:pathLst>
+              <a:path w="84418" h="127928">
+                <a:moveTo>
+                  <a:pt x="15838" y="0"/>
+                </a:moveTo>
+                <a:lnTo>
+                  <a:pt x="84418" y="118784"/>
+                </a:lnTo>
+                <a:lnTo>
+                  <a:pt x="68580" y="127928"/>
+                </a:lnTo>
+                <a:lnTo>
+                  <a:pt x="0" y="9144"/>
+                </a:lnTo>
+                <a:close/>
+              </a:path>
+            </a:pathLst>
+          </a:custGeom>
+          <a:solidFill>
+            <a:srgbClr val="3A3A3A"/>
+          </a:solidFill>
+          <a:ln>
+            <a:noFill/>
+          </a:ln>
+          <a:effectLst/>
+        </p:spPr>
+        <p:style>
+          <a:lnRef idx="1">
+            <a:schemeClr val="accent1"/>
+          </a:lnRef>
+          <a:fillRef idx="3">
+            <a:schemeClr val="accent1"/>
+          </a:fillRef>
+          <a:effectRef idx="2">
+            <a:schemeClr val="accent1"/>
+          </a:effectRef>
+          <a:fontRef idx="minor">
+            <a:schemeClr val="lt1"/>
+          </a:fontRef>
+        </p:style>
+        <p:txBody>
+          <a:bodyPr rtlCol="0" anchor="ctr"/>
+          <a:lstStyle/>
+          <a:p>
+            <a:pPr algn="ctr"/>
+          </a:p>
+        </p:txBody>
+      </p:sp>
+      <p:sp>
+        <p:nvSpPr>
+          <p:cNvPr id="26" name="Oval 25"/>
+          <p:cNvSpPr/>
+          <p:nvPr/>
+        </p:nvSpPr>
+        <p:spPr>
+          <a:xfrm>
+            <a:off x="864301" y="827688"/>
+            <a:ext cx="29260" cy="29260"/>
+          </a:xfrm>
+          <a:prstGeom prst="ellipse">
+            <a:avLst/>
+          </a:prstGeom>
+          <a:solidFill>
+            <a:srgbClr val="3A3A3A">
+              <a:alpha val="100000"/>
+            </a:srgbClr>
+          </a:solidFill>
+          <a:ln w="7620">
+            <a:solidFill>
+              <a:srgbClr val="3A3A3A"/>
+            </a:solidFill>
+          </a:ln>
+          <a:effectLst/>
+        </p:spPr>
+        <p:style>
+          <a:lnRef idx="1">
+            <a:schemeClr val="accent1"/>
+          </a:lnRef>
+          <a:fillRef idx="3">
+            <a:schemeClr val="accent1"/>
+          </a:fillRef>
+          <a:effectRef idx="2">
+            <a:schemeClr val="accent1"/>
+          </a:effectRef>
+          <a:fontRef idx="minor">
+            <a:schemeClr val="lt1"/>
+          </a:fontRef>
+        </p:style>
+        <p:txBody>
+          <a:bodyPr rtlCol="0" anchor="ctr"/>
+          <a:lstStyle/>
+          <a:p>
+            <a:pPr algn="ctr"/>
+          </a:p>
+        </p:txBody>
+      </p:sp>
       <p:cxnSp>
         <p:nvCxnSpPr>
-          <p:cNvPr id="24" name="Connector 23"/>
+          <p:cNvPr id="27" name="Connector 26"/>
           <p:cNvCxnSpPr/>
           <p:nvPr/>
         </p:nvCxnSpPr>
         <p:spPr>
           <a:xfrm flipV="1">
-            <a:off x="720552" y="787454"/>
-            <a:ext cx="253406" cy="146304"/>
+            <a:off x="641363" y="851462"/>
+            <a:ext cx="221730" cy="128016"/>
           </a:xfrm>
           <a:prstGeom prst="line">
             <a:avLst/>
@@ -4223,13 +4401,13 @@
       </p:cxnSp>
       <p:sp>
         <p:nvSpPr>
-          <p:cNvPr id="25" name="TextBox 24"/>
+          <p:cNvPr id="28" name="TextBox 27"/>
           <p:cNvSpPr txBox="1"/>
           <p:nvPr/>
         </p:nvSpPr>
         <p:spPr>
           <a:xfrm>
-            <a:off x="674832" y="961190"/>
+            <a:off x="595643" y="1006910"/>
             <a:ext cx="182880" cy="128016"/>
           </a:xfrm>
           <a:prstGeom prst="rect">
@@ -4271,14 +4449,14 @@
       </p:sp>
       <p:sp>
         <p:nvSpPr>
-          <p:cNvPr id="26" name="Freeform 25"/>
+          <p:cNvPr id="29" name="Freeform 28"/>
           <p:cNvSpPr/>
           <p:nvPr/>
         </p:nvSpPr>
         <p:spPr>
           <a:xfrm>
-            <a:off x="839336" y="865178"/>
-            <a:ext cx="45461" cy="49612"/>
+            <a:off x="807661" y="883466"/>
+            <a:ext cx="56157" cy="61285"/>
           </a:xfrm>
           <a:custGeom>
             <a:avLst/>
@@ -4287,27 +4465,27 @@
             <a:cxnLst/>
             <a:rect l="l" t="t" r="r" b="b"/>
             <a:pathLst>
-              <a:path w="45461" h="49612">
+              <a:path w="56157" h="61285">
                 <a:moveTo>
-                  <a:pt x="45461" y="49612"/>
+                  <a:pt x="56157" y="61285"/>
                 </a:moveTo>
                 <a:lnTo>
-                  <a:pt x="37702" y="43810"/>
-                </a:lnTo>
-                <a:lnTo>
-                  <a:pt x="30320" y="37537"/>
-                </a:lnTo>
-                <a:lnTo>
-                  <a:pt x="23342" y="30816"/>
-                </a:lnTo>
-                <a:lnTo>
-                  <a:pt x="16797" y="23673"/>
-                </a:lnTo>
-                <a:lnTo>
-                  <a:pt x="10710" y="16136"/>
-                </a:lnTo>
-                <a:lnTo>
-                  <a:pt x="5104" y="8235"/>
+                  <a:pt x="46572" y="54119"/>
+                </a:lnTo>
+                <a:lnTo>
+                  <a:pt x="37453" y="46369"/>
+                </a:lnTo>
+                <a:lnTo>
+                  <a:pt x="28834" y="38067"/>
+                </a:lnTo>
+                <a:lnTo>
+                  <a:pt x="20749" y="29243"/>
+                </a:lnTo>
+                <a:lnTo>
+                  <a:pt x="13229" y="19933"/>
+                </a:lnTo>
+                <a:lnTo>
+                  <a:pt x="6304" y="10173"/>
                 </a:lnTo>
                 <a:lnTo>
                   <a:pt x="0" y="0"/>
@@ -4347,13 +4525,13 @@
       </p:sp>
       <p:sp>
         <p:nvSpPr>
-          <p:cNvPr id="27" name="TextBox 26"/>
+          <p:cNvPr id="30" name="TextBox 29"/>
           <p:cNvSpPr txBox="1"/>
           <p:nvPr/>
         </p:nvSpPr>
         <p:spPr>
           <a:xfrm>
-            <a:off x="750553" y="877886"/>
+            <a:off x="723586" y="902597"/>
             <a:ext cx="109728" cy="128016"/>
           </a:xfrm>
           <a:prstGeom prst="rect">
@@ -4386,7 +4564,7 @@
       </p:sp>
       <p:sp>
         <p:nvSpPr>
-          <p:cNvPr id="28" name="TextBox 27"/>
+          <p:cNvPr id="31" name="TextBox 30"/>
           <p:cNvSpPr txBox="1"/>
           <p:nvPr/>
         </p:nvSpPr>

--- a/figures/ppt/fig3_frames.pptx
+++ b/figures/ppt/fig3_frames.pptx
@@ -4192,8 +4192,8 @@
         </p:nvSpPr>
         <p:spPr>
           <a:xfrm>
-            <a:off x="873170" y="768628"/>
-            <a:ext cx="116937" cy="83668"/>
+            <a:off x="920684" y="768628"/>
+            <a:ext cx="69423" cy="56236"/>
           </a:xfrm>
           <a:custGeom>
             <a:avLst/>
@@ -4202,18 +4202,18 @@
             <a:cxnLst/>
             <a:rect l="l" t="t" r="r" b="b"/>
             <a:pathLst>
-              <a:path w="116937" h="83668">
+              <a:path w="69423" h="56236">
                 <a:moveTo>
-                  <a:pt x="100478" y="0"/>
+                  <a:pt x="52964" y="0"/>
                 </a:moveTo>
                 <a:lnTo>
-                  <a:pt x="116937" y="28508"/>
-                </a:lnTo>
-                <a:lnTo>
-                  <a:pt x="11522" y="83668"/>
-                </a:lnTo>
-                <a:lnTo>
-                  <a:pt x="0" y="63712"/>
+                  <a:pt x="69423" y="28508"/>
+                </a:lnTo>
+                <a:lnTo>
+                  <a:pt x="11521" y="56236"/>
+                </a:lnTo>
+                <a:lnTo>
+                  <a:pt x="0" y="36280"/>
                 </a:lnTo>
                 <a:close/>
               </a:path>
@@ -4257,8 +4257,8 @@
         </p:nvSpPr>
         <p:spPr>
           <a:xfrm>
-            <a:off x="836722" y="778354"/>
-            <a:ext cx="84418" cy="127928"/>
+            <a:off x="890971" y="761674"/>
+            <a:ext cx="70947" cy="106425"/>
           </a:xfrm>
           <a:custGeom>
             <a:avLst/>
@@ -4267,18 +4267,18 @@
             <a:cxnLst/>
             <a:rect l="l" t="t" r="r" b="b"/>
             <a:pathLst>
-              <a:path w="84418" h="127928">
+              <a:path w="70947" h="106425">
                 <a:moveTo>
-                  <a:pt x="15838" y="0"/>
+                  <a:pt x="14254" y="0"/>
                 </a:moveTo>
                 <a:lnTo>
-                  <a:pt x="84418" y="118784"/>
-                </a:lnTo>
-                <a:lnTo>
-                  <a:pt x="68580" y="127928"/>
-                </a:lnTo>
-                <a:lnTo>
-                  <a:pt x="0" y="9144"/>
+                  <a:pt x="70947" y="98195"/>
+                </a:lnTo>
+                <a:lnTo>
+                  <a:pt x="56693" y="106425"/>
+                </a:lnTo>
+                <a:lnTo>
+                  <a:pt x="0" y="8230"/>
                 </a:lnTo>
                 <a:close/>
               </a:path>
@@ -4322,7 +4322,7 @@
         </p:nvSpPr>
         <p:spPr>
           <a:xfrm>
-            <a:off x="864301" y="827688"/>
+            <a:off x="911814" y="800256"/>
             <a:ext cx="29260" cy="29260"/>
           </a:xfrm>
           <a:prstGeom prst="ellipse">
@@ -4370,7 +4370,7 @@
         </p:nvCxnSpPr>
         <p:spPr>
           <a:xfrm flipV="1">
-            <a:off x="641363" y="851462"/>
+            <a:off x="688877" y="824030"/>
             <a:ext cx="221730" cy="128016"/>
           </a:xfrm>
           <a:prstGeom prst="line">
@@ -4407,7 +4407,7 @@
         </p:nvSpPr>
         <p:spPr>
           <a:xfrm>
-            <a:off x="595643" y="1006910"/>
+            <a:off x="643157" y="979478"/>
             <a:ext cx="182880" cy="128016"/>
           </a:xfrm>
           <a:prstGeom prst="rect">
